--- a/Invisign-Defense.pptx
+++ b/Invisign-Defense.pptx
@@ -530,7 +530,7 @@
             </a:pPr>
             <a:r>
               <a:rPr sz="1150"/>
-              <a:t>Good morning. I'm Fernando Valdés, and my capstone is Invisign — a system that hides an invisible, recoverable watermark inside an image, so that when a copy leaks, the owner can tell exactly which copy it was. I'll walk through the problem, how the method works at a high level, what the experiments show, the working product I built around it, and where it sits commercially. It should take about fifteen minutes, and I'm happy to take questions at the end.</a:t>
+              <a:t>Good morning. I'm Fernando Valdés, and my capstone is Invisign, a system that hides an invisible, recoverable watermark inside an image, so that when a copy leaks, the owner can tell exactly which copy it was. I'll walk through the problem, how the method works at a high level, what the experiments show, the working product I built around it, and where it sits commercially. It should take about fifteen minutes, and I'm happy to take questions at the end.</a:t>
             </a:r>
           </a:p>
         </p:txBody>
@@ -612,7 +612,7 @@
             </a:pPr>
             <a:r>
               <a:rPr sz="1150"/>
-              <a:t>A fair challenge: why not just faintly add the watermark on top and subtract it later? I implemented exactly that, plus the classic LSB method, and ran all three through the same battery. On pristine images the simple overlay is genuinely competitive — I'm not hiding that. But a leaked image is never pristine. On precisely the distortions a leak imposes — noise, JPEG, blur, pixelation — the SVD mark is the only one of the three that survives. That's the specific, honest value of the method: robustness to lossy processing.</a:t>
+              <a:t>A fair challenge: why not just faintly add the watermark on top and subtract it later? I implemented exactly that, plus the classic LSB method, and ran all three through the same battery. On pristine images the simple overlay is genuinely competitive; I'm not hiding that. But a leaked image is never pristine. On precisely the distortions a leak imposes (noise, JPEG, blur, pixelation) the SVD mark is the only one of the three that survives. That's the specific, honest value of the method: robustness to lossy processing.</a:t>
             </a:r>
           </a:p>
           <a:p>
@@ -634,13 +634,13 @@
             </a:pPr>
             <a:r>
               <a:rPr b="1" sz="1100"/>
-              <a:t>Q.  So on clean, geometric and tone attacks the trivial overlay ties or beats you — doesn't that undercut SVD?</a:t>
+              <a:t>Q.  So on clean, geometric and tone attacks the trivial overlay ties or beats you. Doesn't that undercut SVD?</a:t>
             </a:r>
           </a:p>
           <a:p>
             <a:r>
               <a:rPr sz="1100"/>
-              <a:t>A.  On those cases, yes, and I report it openly. The point is that real redistribution is lossy, and that's the one regime where the simple methods collapse and SVD holds. The methods are complementary; SVD earns its place on the attacks that actually happen in the wild.</a:t>
+              <a:t>A.  On those cases, yes, and I report it openly. The point is that real redistribution is lossy, and that's the one regime where the simple methods collapse and SVD holds. The methods are complementary; SVD earns its place on the attacks that actually occur in the wild.</a:t>
             </a:r>
           </a:p>
           <a:p>
@@ -657,7 +657,7 @@
           <a:p>
             <a:r>
               <a:rPr sz="1100"/>
-              <a:t>A.  It's blind — it can't subtract the original — so any change to pixel values wipes it, and it has no way to re-synchronize after a rotation.</a:t>
+              <a:t>A.  It's blind (it can't subtract the original), so any change to pixel values wipes it, and it has no way to re-synchronize after a rotation.</a:t>
             </a:r>
           </a:p>
         </p:txBody>
@@ -739,7 +739,7 @@
             </a:pPr>
             <a:r>
               <a:rPr sz="1150"/>
-              <a:t>This isn't just an algorithm — it's a working application. A React front-end handles upload, engraving, extraction and results; a Laravel API owns accounts, storage and orchestration; a stateless Python service does the actual watermarking math; and MariaDB stores the records. The whole stack comes up with a single Docker Compose command.</a:t>
+              <a:t>This isn't just an algorithm: it's a working application. A React front-end handles upload, engraving, extraction and results; a Laravel API owns accounts, storage and orchestration; a stateless Python service does the actual watermarking math; and MariaDB stores the records. The whole stack comes up with a single Docker Compose command.</a:t>
             </a:r>
           </a:p>
           <a:p>
@@ -767,7 +767,7 @@
           <a:p>
             <a:r>
               <a:rPr sz="1100"/>
-              <a:t>A.  The math lives naturally in NumPy and OpenCV, so I isolated it as a stateless microservice — it's language-appropriate, independently scalable, and keeps Laravel focused on state and business logic.</a:t>
+              <a:t>A.  The math lives naturally in NumPy and OpenCV, so I isolated it as a stateless microservice: it's language-appropriate, independently scalable, and keeps Laravel focused on state and business logic.</a:t>
             </a:r>
           </a:p>
           <a:p>
@@ -784,7 +784,7 @@
           <a:p>
             <a:r>
               <a:rPr sz="1100"/>
-              <a:t>A.  It makes it trivially horizontally scalable and easy to reason about — all persistence lives in Laravel and the database.</a:t>
+              <a:t>A.  It makes it trivially horizontally scalable and easy to reason about; all persistence lives in Laravel and the database.</a:t>
             </a:r>
           </a:p>
         </p:txBody>
@@ -948,7 +948,7 @@
             </a:pPr>
             <a:r>
               <a:rPr sz="1150"/>
-              <a:t>Commercially, watermarking is several overlapping segments. Invisign targets forensic tracing — a different mark per recipient. That's a real, monetized segment, most mature in video today and thinner for still images. The tailwinds are strong: ever more image sharing online, and generative AI raising the stakes on provenance and authenticity — both a threat and a driver.</a:t>
+              <a:t>Commercially, watermarking is several overlapping segments. Invisign targets forensic tracing: a different mark per recipient. That's a real, monetized segment, most mature in video today and thinner for still images. The tailwinds are strong: ever more image sharing online, and generative AI raising the stakes on provenance and authenticity, both a threat and a driver.</a:t>
             </a:r>
           </a:p>
           <a:p>
@@ -970,7 +970,7 @@
             </a:pPr>
             <a:r>
               <a:rPr b="1" sz="1100"/>
-              <a:t>Q.  Why target the smallest slice — still-image forensics?</a:t>
+              <a:t>Q.  Why target the smallest slice, still-image forensics?</a:t>
             </a:r>
           </a:p>
           <a:p>
@@ -1058,7 +1058,7 @@
             </a:pPr>
             <a:r>
               <a:rPr sz="1150"/>
-              <a:t>The closest analog is IMATAG — invisible forensic watermarking for images, plus web monitoring to find the leaked copy, which we don't attempt. Digimarc is the broad incumbent, spanning images, audio and packaging. Verimatrix and NexGuard do exactly our studio-to-cinema model, but for video — which is the proof that the use case is real and monetizable. And C2PA and SynthID are adjacent: they answer 'is this AI-made?' rather than 'who leaked it?'</a:t>
+              <a:t>The closest analog is IMATAG: invisible forensic watermarking for images, plus web monitoring to find the leaked copy, which we don't attempt. Digimarc is the broad incumbent, spanning images, audio and packaging. Verimatrix and NexGuard do exactly our studio-to-cinema model, but for video, which is the proof that the use case is real and monetizable. And C2PA and SynthID are adjacent: they answer 'is this AI-made?' rather than 'who leaked it?'</a:t>
             </a:r>
           </a:p>
           <a:p>
@@ -1103,7 +1103,7 @@
           <a:p>
             <a:r>
               <a:rPr sz="1100"/>
-              <a:t>A.  Different medium, different channel. Stills dominate press, stock and social leaks, and the robustness profile — JPEG, resize, blur — is distinct from video. It's an underserved niche.</a:t>
+              <a:t>A.  Different medium, different channel. Stills dominate press, stock and social leaks, and the robustness profile (JPEG, resize, blur) is distinct from video. It's an underserved niche.</a:t>
             </a:r>
           </a:p>
         </p:txBody>
@@ -1185,7 +1185,7 @@
             </a:pPr>
             <a:r>
               <a:rPr sz="1150"/>
-              <a:t>I'm candid that this is a demonstrator, not a finished product. Three build-outs would close the gap. First, web monitoring — automatically finding leaked copies, rather than assuming the suspect image is already in hand. Second, serial capacity with collusion resistance — carrying thousands of coded marks, hardened against recipients pooling their copies to wash the mark out, which needs anti-collusion fingerprint codes like Tardos codes. And third, robustness to harder channels — especially video and camcorder capture, the dominant real-world leak path.</a:t>
+              <a:t>I'm candid that this is a demonstrator, not a finished product. Three build-outs would close the gap. First, web monitoring: automatically finding leaked copies, rather than assuming the suspect image is already in hand. Second, serial capacity with collusion resistance: carrying thousands of coded marks, hardened against recipients pooling their copies to wash the mark out, which needs anti-collusion fingerprint codes like Tardos codes. And third, robustness to harder channels: especially video and camcorder capture, the dominant real-world leak path.</a:t>
             </a:r>
           </a:p>
           <a:p>
@@ -1213,7 +1213,7 @@
           <a:p>
             <a:r>
               <a:rPr sz="1100"/>
-              <a:t>A.  Several recipients average their differently-marked copies together to erase the per-copy mark. Defeating it needs fingerprinting codes designed for it — that's a known, well-studied area, and it's on the roadmap.</a:t>
+              <a:t>A.  Several recipients average their differently-marked copies together to erase the per-copy mark. Defeating it needs fingerprinting codes designed for it; that's a known, well-studied area, and it's on the roadmap.</a:t>
             </a:r>
           </a:p>
           <a:p>
@@ -1230,7 +1230,7 @@
           <a:p>
             <a:r>
               <a:rPr sz="1100"/>
-              <a:t>A.  The embed/extract core is solid and honestly measured. The gap to a product is engineering and scope — monitoring, capacity, video — not a fundamental flaw in the method.</a:t>
+              <a:t>A.  The embed/extract core is solid and honestly measured. The gap to a product is engineering and scope (monitoring, capacity, video), not a fundamental flaw in the method.</a:t>
             </a:r>
           </a:p>
         </p:txBody>
@@ -1312,7 +1312,7 @@
             </a:pPr>
             <a:r>
               <a:rPr sz="1150"/>
-              <a:t>To summarize. Invisign is a working invisible watermark that embeds and recovers at a strength the eye can't see. It's robust where it counts — geometry, JPEG, blur and noise, the edits a leaked image really undergoes. It's measured honestly, against true no-mark baselines on a standard benchmark. And it's a complete, deployed application, not just an algorithm. Thank you — I'd be glad to take your questions.</a:t>
+              <a:t>To summarize. Invisign is a working invisible watermark that embeds and recovers at a strength the eye can't see. It's robust where it counts: geometry, JPEG, blur and noise, the edits a leaked image really undergoes. It's measured honestly, against true no-mark baselines on a standard benchmark. And it's a complete, deployed application, not just an algorithm. Thank you. I'd be glad to take your questions.</a:t>
             </a:r>
           </a:p>
         </p:txBody>
@@ -1394,7 +1394,7 @@
             </a:pPr>
             <a:r>
               <a:rPr sz="1150"/>
-              <a:t>Thank you — questions welcome. The live site and the source repository are on screen.</a:t>
+              <a:t>Thank you. Questions welcome. The QR code on screen goes straight to the live product at invisign dot com, and the source repository is on screen as well.</a:t>
             </a:r>
           </a:p>
         </p:txBody>
@@ -1476,7 +1476,7 @@
             </a:pPr>
             <a:r>
               <a:rPr sz="1150"/>
-              <a:t>Organizations constantly share images they own — studios ship films to cinemas, agencies license photos, platforms seed content to partners. Copies inevitably escape. The trouble is that the obvious defenses all fail on the journey a leaked file takes: a visible watermark defaces the asset and gets cropped out; metadata and EXIF tags are stripped the moment the file is re-saved; and naive hidden marks are destroyed by re-compression and blur. So the question 'who leaked this?' usually goes unanswered.</a:t>
+              <a:t>Organizations constantly share images they own: studios ship films to cinemas, agencies license photos, platforms seed content to partners. Copies inevitably escape. The trouble is that the obvious defenses all fail on the journey a leaked file takes: a visible watermark defaces the asset and gets cropped out; metadata and EXIF tags are stripped the moment the file is re-saved; and naive hidden marks are destroyed by re-compression and blur. So the question 'who leaked this?' usually goes unanswered.</a:t>
             </a:r>
           </a:p>
           <a:p>
@@ -1504,7 +1504,7 @@
           <a:p>
             <a:r>
               <a:rPr sz="1100"/>
-              <a:t>A.  No — DRM tries to PREVENT copying. We assume copying already happened and focus on attribution after the fact. They're complementary.</a:t>
+              <a:t>A.  No. DRM tries to PREVENT copying. We assume copying already happened and focus on attribution after the fact. They're complementary.</a:t>
             </a:r>
           </a:p>
           <a:p>
@@ -1521,7 +1521,7 @@
           <a:p>
             <a:r>
               <a:rPr sz="1100"/>
-              <a:t>A.  A hash breaks under any edit — one changed pixel and it no longer matches. We need something that survives recompression and blur, which is exactly what a robust watermark gives you.</a:t>
+              <a:t>A.  A hash breaks under any edit: one changed pixel and it no longer matches. We need something that survives recompression and blur, which is exactly what a robust watermark gives you.</a:t>
             </a:r>
           </a:p>
         </p:txBody>
@@ -1603,7 +1603,7 @@
             </a:pPr>
             <a:r>
               <a:rPr sz="1150"/>
-              <a:t>Invisign hides the mark inside the image's underlying mathematical structure rather than painting it on top. Four properties matter. It's invisible — around 50 decibels, where the eye simply can't see it. It's recoverable — we can pull the mark back out. It survives real-world edits like recompression and blur. And crucially it can be different for every recipient, so the mark itself identifies the source of a leak. On the right, the original and the marked version are indistinguishable — that's the actual marked file, not a trick.</a:t>
+              <a:t>Invisign hides the mark inside the image's underlying mathematical structure rather than painting it on top. Four properties matter. It's invisible, around 50 decibels, where the eye simply can't see it. It's recoverable: we can pull the mark back out. It survives real-world edits like recompression and blur. And crucially it can be different for every recipient, so the mark itself identifies the source of a leak. On the right, the original and the marked version are indistinguishable; that's the actual marked file, not a trick.</a:t>
             </a:r>
           </a:p>
         </p:txBody>
@@ -1685,7 +1685,7 @@
             </a:pPr>
             <a:r>
               <a:rPr sz="1150"/>
-              <a:t>The method fits owners who hold the master copy. Give each recipient a copy carrying a different hidden mark; when one leaks, you match the leak against your known marks. Because you already hold the original, the fact that extraction needs the original costs you nothing — and it turns the problem into a simple 'which recipient matches best?' comparison rather than blind detection.</a:t>
+              <a:t>The method fits owners who hold the master copy. Give each recipient a copy carrying a different hidden mark; when one leaks, you match the leak against your known marks. Because you already hold the original, the fact that extraction needs the original costs you nothing, and it turns the problem into a simple 'which recipient matches best?' comparison rather than blind detection.</a:t>
             </a:r>
           </a:p>
           <a:p>
@@ -1707,13 +1707,13 @@
             </a:pPr>
             <a:r>
               <a:rPr b="1" sz="1100"/>
-              <a:t>Q.  Extraction needs the original image AND the original watermark — isn't that a serious limitation?</a:t>
+              <a:t>Q.  Extraction needs the original image AND the original watermark. Isn't that a serious limitation?</a:t>
             </a:r>
           </a:p>
           <a:p>
             <a:r>
               <a:rPr sz="1100"/>
-              <a:t>A.  For this use case, no — the owner holds the master by construction, so it's free. It would only be a limitation for blind detection in the wild, which is explicitly not our target.</a:t>
+              <a:t>A.  For this use case, no: the owner holds the master by construction, so it's free. It would only be a limitation for blind detection in the wild, which is explicitly not our target.</a:t>
             </a:r>
           </a:p>
           <a:p>
@@ -1812,7 +1812,7 @@
             </a:pPr>
             <a:r>
               <a:rPr sz="1150"/>
-              <a:t>At a high level: we tile the image into small 16-by-16 blocks. Each block has one dominant value — think of it as the block's core energy or brightness — that comes from a standard linear-algebra decomposition called the SVD. We nudge that single value by a microscopic amount driven by the watermark, then reassemble. Because we touch only the dominant value, by a tiny amount, the picture looks identical. The image on the right is that change amplified thirty times, just so you can see where it lives.</a:t>
+              <a:t>At a high level: we tile the image into small 16-by-16 blocks. Each block has one dominant value (think of it as the block's core energy or brightness) that comes from a standard linear-algebra decomposition called the SVD. We nudge that single value by a microscopic amount driven by the watermark, then reassemble. Because we touch only the dominant value, by a tiny amount, the picture looks identical. The image on the right is that change amplified thirty times, just so you can see where it lives.</a:t>
             </a:r>
           </a:p>
           <a:p>
@@ -1851,13 +1851,13 @@
             </a:pPr>
             <a:r>
               <a:rPr b="1" sz="1100"/>
-              <a:t>Q.  Your source paper used a Walsh-Hadamard transform first — where did it go?</a:t>
+              <a:t>Q.  Your source paper used a Walsh-Hadamard transform first. Where did it go?</a:t>
             </a:r>
           </a:p>
           <a:p>
             <a:r>
               <a:rPr sz="1100"/>
-              <a:t>A.  I removed it deliberately. That transform is orthogonal, and singular values are mathematically invariant under orthogonal transforms — so it cannot change anything this scheme reads or writes. An ablation confirmed identical results within rounding. Removing it means the same output with less computation.</a:t>
+              <a:t>A.  I removed it deliberately. That transform is orthogonal, and singular values are mathematically invariant under orthogonal transforms, so it cannot change anything this scheme reads or writes. An ablation confirmed identical results within rounding. Removing it means the same output with less computation.</a:t>
             </a:r>
           </a:p>
           <a:p>
@@ -1874,7 +1874,7 @@
           <a:p>
             <a:r>
               <a:rPr sz="1100"/>
-              <a:t>A.  It balances the number of blocks — which gives capacity and redundancy — against keeping each block locally coherent so one value represents it well.</a:t>
+              <a:t>A.  It balances the number of blocks (which gives capacity and redundancy) against keeping each block locally coherent so one value represents it well.</a:t>
             </a:r>
           </a:p>
         </p:txBody>
@@ -1956,7 +1956,7 @@
             </a:pPr>
             <a:r>
               <a:rPr sz="1150"/>
-              <a:t>Invisibility is measured with PSNR — higher is better, and above roughly 40 decibels the human eye can't tell the difference. At our shipping strength we sit at 51 decibels with a structural similarity of 0.999, across all 39 test images — mathematically indistinguishable. Strength is a single knob: crank it to the original paper's value and you do get visible banding, bottom-right — that's our reserve for hostile channels, but it's not what we ship.</a:t>
+              <a:t>Invisibility is measured with PSNR: higher is better, and above roughly 40 decibels the human eye can't tell the difference. At our shipping strength we sit at 51 decibels with a structural similarity of 0.999, across all 39 test images: mathematically indistinguishable. Strength is a single knob: crank it to the original paper's value and you do get visible banding, bottom-right; that's our reserve for hostile channels, but it's not what we ship.</a:t>
             </a:r>
           </a:p>
           <a:p>
@@ -1984,7 +1984,7 @@
           <a:p>
             <a:r>
               <a:rPr sz="1100"/>
-              <a:t>A.  It's the sweet spot. The previous default of 0.00005 was so small the change didn't survive 8-bit rounding — it embedded nothing recoverable. The paper's 0.7 is robust but visibly degrades the image to 22 dB. 0.01 is invisible at ~51 dB yet recoverable.</a:t>
+              <a:t>A.  It's the sweet spot. The previous default of 0.00005 was so small the change didn't survive 8-bit rounding, so it embedded nothing recoverable. The paper's 0.7 is robust but visibly degrades the image to 22 dB. 0.01 is invisible at ~51 dB yet recoverable.</a:t>
             </a:r>
           </a:p>
           <a:p>
@@ -2083,7 +2083,7 @@
             </a:pPr>
             <a:r>
               <a:rPr sz="1150"/>
-              <a:t>And it genuinely comes back out. We feed the marked image — plus the original — into extraction and recover the star. Recovery quality is scored with a normalized cross-correlation, where 1.0 is identical; on a clean copy we get 0.97. So both embedding and recovery work at an invisible strength. The natural next question is how that holds up under attack — which is the next slides.</a:t>
+              <a:t>And it genuinely comes back out. We feed the marked image, plus the original, into extraction and recover the star. Recovery quality is scored with a normalized cross-correlation, where 1.0 is identical; on a clean copy we get 0.97. So both embedding and recovery work at an invisible strength. The natural next question is how that holds up under attack, which is the next slides.</a:t>
             </a:r>
           </a:p>
           <a:p>
@@ -2105,13 +2105,13 @@
             </a:pPr>
             <a:r>
               <a:rPr b="1" sz="1100"/>
-              <a:t>Q.  That 0.97 is on a clean image — what about after attacks?</a:t>
+              <a:t>Q.  That 0.97 is on a clean image; what about after attacks?</a:t>
             </a:r>
           </a:p>
           <a:p>
             <a:r>
               <a:rPr sz="1100"/>
-              <a:t>A.  That's exactly what the next two slides cover — it stays strong through geometry, JPEG, blur and noise.</a:t>
+              <a:t>A.  That's exactly what the next two slides cover: it stays strong through geometry, JPEG, blur and noise.</a:t>
             </a:r>
           </a:p>
           <a:p>
@@ -2210,7 +2210,7 @@
             </a:pPr>
             <a:r>
               <a:rPr sz="1150"/>
-              <a:t>I want to be precise about how I measured, because it's easy to fool yourself here. I used the USC-SIPI suite — the 39 standard images the watermarking literature uses — and eight attacks. Here's the subtle part: our extraction rebuilds a watermark-shaped image from the watermark's own structure, so even an unmarked image produces a partial 'match' by construction — a floor of about 0.49. So I never report raw match scores. For every test I also extract from an unmarked copy, put through the same attack, and subtract that baseline. Every number I show is the genuine lift the watermark adds.</a:t>
+              <a:t>I want to be precise about how I measured, because it's easy to fool yourself here. I used the USC-SIPI suite (the 39 standard images the watermarking literature uses) and eight attacks. Here's the subtle part: our extraction rebuilds a watermark-shaped image from the watermark's own structure, so even an unmarked image produces a partial 'match' by construction: a floor of about 0.49. So I never report raw match scores. For every test I also extract from an unmarked copy, put through the same attack, and subtract that baseline. Every number I show is the genuine lift the watermark adds.</a:t>
             </a:r>
           </a:p>
           <a:p>
@@ -2255,7 +2255,7 @@
           <a:p>
             <a:r>
               <a:rPr sz="1100"/>
-              <a:t>A.  It's the field-standard benchmark, deliberately spanning high- and low-frequency content and a grayscale/color mix. Larger purpose-built sets — BOWS-2's 10,000 images, Kodak — are available to scale the study, and the pipeline already supports them.</a:t>
+              <a:t>A.  It's the field-standard benchmark, deliberately spanning high- and low-frequency content and a grayscale/color mix. Larger purpose-built sets (BOWS-2's 10,000 images, Kodak) are available to scale the study, and the pipeline already supports them.</a:t>
             </a:r>
           </a:p>
           <a:p>
@@ -2272,7 +2272,7 @@
           <a:p>
             <a:r>
               <a:rPr sz="1100"/>
-              <a:t>A.  It's the opposite — it's the conservative choice. Raw NCC would look far better (0.8–0.9). Lift strips out everything the method doesn't actually earn.</a:t>
+              <a:t>A.  It's the opposite: it's the conservative choice. Raw NCC would look far better (0.8–0.9). Lift strips out everything the method doesn't actually earn.</a:t>
             </a:r>
           </a:p>
         </p:txBody>
@@ -2354,7 +2354,7 @@
             </a:pPr>
             <a:r>
               <a:rPr sz="1150"/>
-              <a:t>Here's the headline robustness result, shown as lift over the no-mark baseline — so higher is better. Geometry is essentially free: rotation and mirroring are fully undone, because we search the eight rotation-and-mirror orientations and keep the best one. And the lossy edits a real leak imposes — JPEG, blur, noise — all recover strongly. I'll be upfront that the two low bars on the right, brightness and exposure, are the honest weak spot at this strength, and I'm happy to explain why.</a:t>
+              <a:t>Here's the headline robustness result, shown as lift over the no-mark baseline, so higher is better. Geometry is essentially free: rotation and mirroring are fully undone, because we search the eight rotation-and-mirror orientations and keep the best one. And the lossy edits a real leak imposes (JPEG, blur, noise) all recover strongly. I'll be upfront that the two low bars on the right, brightness and exposure, are the honest weak spot at this strength, and I'm happy to explain why.</a:t>
             </a:r>
           </a:p>
           <a:p>
@@ -2376,13 +2376,13 @@
             </a:pPr>
             <a:r>
               <a:rPr b="1" sz="1100"/>
-              <a:t>Q.  Brightness and exposure are near zero — isn't that a failure?</a:t>
+              <a:t>Q.  Brightness and exposure are near zero. Isn't that a failure?</a:t>
             </a:r>
           </a:p>
           <a:p>
             <a:r>
               <a:rPr sz="1100"/>
-              <a:t>A.  They're global tone curves that rescale the singular values non-linearly, which breaks our additive model. They recover at higher strength. For still-image tracing the dominant channel is recompression, resize and blur — which we handle — so tone shifts are a secondary, bounded limitation, not a showstopper.</a:t>
+              <a:t>A.  They're global tone curves that rescale the singular values non-linearly, which breaks our additive model. They recover at higher strength. And because the owner holds the original, a tone-normalization step (histogram-matching the suspect image to the original before extraction) can largely undo these curves as preprocessing, without touching the core method. For still-image tracing the dominant channel is recompression, resize and blur, which we handle, so tone shifts are a secondary, bounded limitation.</a:t>
             </a:r>
           </a:p>
           <a:p>
@@ -2399,7 +2399,24 @@
           <a:p>
             <a:r>
               <a:rPr sz="1100"/>
-              <a:t>A.  For the lossless 90-degree and mirror family we simply try all eight orientations and keep the one that matches best — the correct orientation wins naturally.</a:t>
+              <a:t>A.  For the lossless 90-degree and mirror family we simply try all eight orientations and keep the one that matches best; the correct orientation wins naturally.</a:t>
+            </a:r>
+          </a:p>
+          <a:p>
+            <a:pPr>
+              <a:spcBef>
+                <a:spcPts val="400"/>
+              </a:spcBef>
+            </a:pPr>
+            <a:r>
+              <a:rPr b="1" sz="1100"/>
+              <a:t>Q.  What about arbitrary angles, scaling or cropping?</a:t>
+            </a:r>
+          </a:p>
+          <a:p>
+            <a:r>
+              <a:rPr sz="1100"/>
+              <a:t>A.  Not covered by the dihedral search: those need a registration step (feature-based alignment against the original, which we hold). That's a known preprocessing extension, not a change to the watermarking core.</a:t>
             </a:r>
           </a:p>
         </p:txBody>
@@ -5991,7 +6008,7 @@
                 </a:solidFill>
                 <a:latin typeface="Calibri"/>
               </a:rPr>
-              <a:t>A leaked image is almost never pristine — it has been re-compressed, resized and blurred. That's exactly where simpler tricks fall apart and the SVD mark pulls ahead.</a:t>
+              <a:t>A leaked image is almost never pristine: it has been re-compressed, resized and blurred. That's exactly where simpler tricks fall apart and the SVD mark pulls ahead.</a:t>
             </a:r>
           </a:p>
         </p:txBody>
@@ -7060,7 +7077,7 @@
                 </a:solidFill>
                 <a:latin typeface="Calibri"/>
               </a:rPr>
-              <a:t>The stateless watermarking engine — embed and extract.</a:t>
+              <a:t>The stateless watermarking engine: embed and extract.</a:t>
             </a:r>
           </a:p>
         </p:txBody>
@@ -7337,7 +7354,7 @@
                 </a:solidFill>
                 <a:latin typeface="Calibri"/>
               </a:rPr>
-              <a:t>Containerized with Docker Compose — the whole stack comes up with a single command.</a:t>
+              <a:t>Containerized with Docker Compose: the whole stack comes up with a single command.</a:t>
             </a:r>
           </a:p>
         </p:txBody>
@@ -8740,7 +8757,7 @@
                 </a:solidFill>
                 <a:latin typeface="Calibri"/>
               </a:rPr>
-              <a:t> — a different mark per recipient, so a leak points back to its source.</a:t>
+              <a:t>: a different mark per recipient, so a leak points back to its source.</a:t>
             </a:r>
           </a:p>
         </p:txBody>
@@ -8927,7 +8944,7 @@
                 </a:solidFill>
                 <a:latin typeface="Calibri"/>
               </a:rPr>
-              <a:t>Who leaked this copy? — Invisign's segment. Proven in video, thinner for still images.</a:t>
+              <a:t>Who leaked this copy? Invisign's segment. Proven in video, thinner for still images.</a:t>
             </a:r>
           </a:p>
         </p:txBody>
@@ -9533,7 +9550,7 @@
                 </a:solidFill>
                 <a:latin typeface="Calibri"/>
               </a:rPr>
-              <a:t>Marks in packaging and labels — a separate physical-goods world.</a:t>
+              <a:t>Marks in packaging and labels: a separate physical-goods world.</a:t>
             </a:r>
           </a:p>
         </p:txBody>
@@ -11769,7 +11786,7 @@
                 </a:solidFill>
                 <a:latin typeface="Calibri"/>
               </a:rPr>
-              <a:t>Automatically find leaked copies in the wild — today we assume the suspect image is in hand.</a:t>
+              <a:t>Automatically find leaked copies in the wild; today we assume the suspect image is in hand.</a:t>
             </a:r>
           </a:p>
         </p:txBody>
@@ -12539,7 +12556,7 @@
                 </a:solidFill>
                 <a:latin typeface="Calibri"/>
               </a:rPr>
-              <a:t>Extend robustness to video and camcorder capture — the dominant real-world leak path.</a:t>
+              <a:t>Extend robustness to video and camcorder capture, the dominant real-world leak path.</a:t>
             </a:r>
           </a:p>
         </p:txBody>
@@ -13084,7 +13101,7 @@
                 </a:solidFill>
                 <a:latin typeface="Calibri"/>
               </a:rPr>
-              <a:t>Survives geometry, JPEG, blur and noise — the edits a leaked image really undergoes.</a:t>
+              <a:t>Survives geometry, JPEG, blur and noise: the edits a leaked image really undergoes.</a:t>
             </a:r>
           </a:p>
         </p:txBody>
@@ -13641,7 +13658,7 @@
         <p:spPr>
           <a:xfrm>
             <a:off x="640080" y="2606040"/>
-            <a:ext cx="10972800" cy="1097280"/>
+            <a:ext cx="8229600" cy="1097280"/>
           </a:xfrm>
           <a:prstGeom prst="rect">
             <a:avLst/>
@@ -13686,7 +13703,7 @@
         <p:spPr>
           <a:xfrm>
             <a:off x="658368" y="3703320"/>
-            <a:ext cx="10058400" cy="548640"/>
+            <a:ext cx="8229600" cy="548640"/>
           </a:xfrm>
           <a:prstGeom prst="rect">
             <a:avLst/>
@@ -13775,7 +13792,7 @@
         <p:spPr>
           <a:xfrm>
             <a:off x="658368" y="4800600"/>
-            <a:ext cx="10972800" cy="1097280"/>
+            <a:ext cx="8229600" cy="1097280"/>
           </a:xfrm>
           <a:prstGeom prst="rect">
             <a:avLst/>
@@ -13838,6 +13855,150 @@
                 <a:latin typeface="Calibri"/>
               </a:rPr>
               <a:t>      ·      github.com/fvaldes0109/invisign</a:t>
+            </a:r>
+          </a:p>
+        </p:txBody>
+      </p:sp>
+      <p:sp>
+        <p:nvSpPr>
+          <p:cNvPr id="9" name="Rounded Rectangle 8"/>
+          <p:cNvSpPr/>
+          <p:nvPr/>
+        </p:nvSpPr>
+        <p:spPr>
+          <a:xfrm>
+            <a:off x="9098280" y="2148840"/>
+            <a:ext cx="2468880" cy="2880360"/>
+          </a:xfrm>
+          <a:prstGeom prst="roundRect">
+            <a:avLst>
+              <a:gd name="adj" fmla="val 6000"/>
+            </a:avLst>
+          </a:prstGeom>
+          <a:solidFill>
+            <a:srgbClr val="FFFFFF"/>
+          </a:solidFill>
+          <a:ln>
+            <a:noFill/>
+          </a:ln>
+          <a:effectLst/>
+          <a:effectLst>
+            <a:outerShdw blurRad="80000" dist="30000" dir="5400000" rotWithShape="0">
+              <a:srgbClr val="1A2238">
+                <a:alpha val="18000"/>
+              </a:srgbClr>
+            </a:outerShdw>
+          </a:effectLst>
+        </p:spPr>
+        <p:style>
+          <a:lnRef idx="1">
+            <a:schemeClr val="accent1"/>
+          </a:lnRef>
+          <a:fillRef idx="3">
+            <a:schemeClr val="accent1"/>
+          </a:fillRef>
+          <a:effectRef idx="2">
+            <a:schemeClr val="accent1"/>
+          </a:effectRef>
+          <a:fontRef idx="minor">
+            <a:schemeClr val="lt1"/>
+          </a:fontRef>
+        </p:style>
+        <p:txBody>
+          <a:bodyPr rtlCol="0" anchor="ctr"/>
+          <a:lstStyle/>
+          <a:p>
+            <a:pPr algn="ctr"/>
+          </a:p>
+        </p:txBody>
+      </p:sp>
+      <p:pic>
+        <p:nvPicPr>
+          <p:cNvPr id="10" name="Picture 9" descr="qr_invisign.png"/>
+          <p:cNvPicPr>
+            <a:picLocks noChangeAspect="1"/>
+          </p:cNvPicPr>
+          <p:nvPr/>
+        </p:nvPicPr>
+        <p:blipFill>
+          <a:blip r:embed="rId2"/>
+          <a:stretch>
+            <a:fillRect/>
+          </a:stretch>
+        </p:blipFill>
+        <p:spPr>
+          <a:xfrm>
+            <a:off x="9372600" y="2377440"/>
+            <a:ext cx="1920240" cy="1920240"/>
+          </a:xfrm>
+          <a:prstGeom prst="rect">
+            <a:avLst/>
+          </a:prstGeom>
+        </p:spPr>
+      </p:pic>
+      <p:sp>
+        <p:nvSpPr>
+          <p:cNvPr id="11" name="TextBox 10"/>
+          <p:cNvSpPr txBox="1"/>
+          <p:nvPr/>
+        </p:nvSpPr>
+        <p:spPr>
+          <a:xfrm>
+            <a:off x="9098280" y="4370832"/>
+            <a:ext cx="2468880" cy="548640"/>
+          </a:xfrm>
+          <a:prstGeom prst="rect">
+            <a:avLst/>
+          </a:prstGeom>
+          <a:noFill/>
+        </p:spPr>
+        <p:txBody>
+          <a:bodyPr wrap="square" anchor="t" lIns="0" rIns="0" tIns="0" bIns="0">
+            <a:spAutoFit/>
+          </a:bodyPr>
+          <a:lstStyle/>
+          <a:p>
+            <a:pPr algn="ctr">
+              <a:lnSpc>
+                <a:spcPct val="105000"/>
+              </a:lnSpc>
+              <a:spcBef>
+                <a:spcPts val="0"/>
+              </a:spcBef>
+              <a:spcAft>
+                <a:spcPts val="100"/>
+              </a:spcAft>
+            </a:pPr>
+            <a:r>
+              <a:rPr sz="1200" b="0">
+                <a:solidFill>
+                  <a:srgbClr val="5A6473"/>
+                </a:solidFill>
+                <a:latin typeface="Calibri"/>
+              </a:rPr>
+              <a:t>Scan to visit</a:t>
+            </a:r>
+          </a:p>
+          <a:p>
+            <a:pPr algn="ctr">
+              <a:lnSpc>
+                <a:spcPct val="105000"/>
+              </a:lnSpc>
+              <a:spcBef>
+                <a:spcPts val="0"/>
+              </a:spcBef>
+              <a:spcAft>
+                <a:spcPts val="100"/>
+              </a:spcAft>
+            </a:pPr>
+            <a:r>
+              <a:rPr sz="1400" b="1">
+                <a:solidFill>
+                  <a:srgbClr val="1A2238"/>
+                </a:solidFill>
+                <a:latin typeface="Calibri"/>
+              </a:rPr>
+              <a:t>invisign.com</a:t>
             </a:r>
           </a:p>
         </p:txBody>
@@ -14042,7 +14203,7 @@
                 </a:solidFill>
                 <a:latin typeface="Calibri"/>
               </a:rPr>
-              <a:t>Organizations constantly share images they own — and copies escape. A confidential photo, a licensed asset, a pre-release still ends up somewhere it shouldn't.</a:t>
+              <a:t>Organizations constantly share images they own, and copies escape. A confidential photo, a licensed asset, a pre-release still ends up somewhere it shouldn't.</a:t>
             </a:r>
           </a:p>
         </p:txBody>
@@ -14361,7 +14522,7 @@
                 </a:solidFill>
                 <a:latin typeface="Calibri"/>
               </a:rPr>
-              <a:t>Deface the image — and get cropped out anyway.</a:t>
+              <a:t>Deface the image, and get cropped out anyway.</a:t>
             </a:r>
           </a:p>
         </p:txBody>
@@ -15366,7 +15527,7 @@
                 </a:solidFill>
                 <a:latin typeface="Calibri"/>
               </a:rPr>
-              <a:t>Embedded in the image's underlying structure, not painted on top — the eye can't see it (~50 dB).</a:t>
+              <a:t>Embedded in the image's underlying structure, not painted on top; the eye can't see it (~50 dB).</a:t>
             </a:r>
           </a:p>
           <a:p>
@@ -15446,7 +15607,7 @@
                 </a:solidFill>
                 <a:latin typeface="Calibri"/>
               </a:rPr>
-              <a:t>Holds up through re-compression, resizing and blur — the rough handling a leaked file gets online.</a:t>
+              <a:t>Holds up through re-compression, resizing and blur: the rough handling a leaked file gets online.</a:t>
             </a:r>
           </a:p>
           <a:p>
@@ -15679,7 +15840,7 @@
                 </a:solidFill>
                 <a:latin typeface="Calibri"/>
               </a:rPr>
-              <a:t>Marked — looks identical</a:t>
+              <a:t>Marked: looks identical</a:t>
             </a:r>
           </a:p>
         </p:txBody>
@@ -16303,7 +16464,7 @@
                 </a:solidFill>
                 <a:latin typeface="Calibri"/>
               </a:rPr>
-              <a:t>A different copy to each cinema — trace a pirated screening to its source.</a:t>
+              <a:t>A different copy to each cinema: trace a pirated screening to its source.</a:t>
             </a:r>
           </a:p>
         </p:txBody>
@@ -16622,7 +16783,7 @@
                 </a:solidFill>
                 <a:latin typeface="Calibri"/>
               </a:rPr>
-              <a:t>A per-licensee copy — find who re-distributed a licensed image.</a:t>
+              <a:t>A per-licensee copy: find who re-distributed a licensed image.</a:t>
             </a:r>
           </a:p>
         </p:txBody>
@@ -16853,7 +17014,7 @@
                 </a:solidFill>
                 <a:latin typeface="Calibri"/>
               </a:rPr>
-              <a:t>A per-partner copy — identify the partner behind a leak.</a:t>
+              <a:t>A per-partner copy: identify the partner behind a leak.</a:t>
             </a:r>
           </a:p>
         </p:txBody>
@@ -16944,7 +17105,7 @@
                 </a:solidFill>
                 <a:latin typeface="Calibri"/>
               </a:rPr>
-              <a:t>Because the owner already holds the original, needing it to extract the mark costs them nothing — it turns leak-tracing into a simple </a:t>
+              <a:t>Because the owner already holds the original, needing it to extract the mark costs them nothing: it turns leak-tracing into a simple </a:t>
             </a:r>
             <a:r>
               <a:rPr sz="1500" b="1">
@@ -17793,7 +17954,7 @@
                 </a:solidFill>
                 <a:latin typeface="Calibri"/>
               </a:rPr>
-              <a:t>Stitch the tiles back together — the picture looks unchanged.</a:t>
+              <a:t>Stitch the tiles back together; the picture looks unchanged.</a:t>
             </a:r>
           </a:p>
         </p:txBody>
@@ -18293,7 +18454,7 @@
                 </a:solidFill>
                 <a:latin typeface="Calibri"/>
               </a:rPr>
-              <a:t>Strength can be raised for harsher channels — at a visible cost.</a:t>
+              <a:t>Strength can be raised for harsher channels, at a visible cost.</a:t>
             </a:r>
           </a:p>
         </p:txBody>
@@ -18367,7 +18528,7 @@
                 </a:solidFill>
                 <a:latin typeface="Calibri"/>
               </a:rPr>
-              <a:t>At maximum strength (α = 0.7), faint banding finally appears — the trade-off knob for hostile channels.</a:t>
+              <a:t>At maximum strength (α = 0.7), faint banding finally appears: the trade-off knob for hostile channels.</a:t>
             </a:r>
           </a:p>
         </p:txBody>
@@ -19413,7 +19574,7 @@
                 </a:solidFill>
                 <a:latin typeface="Calibri"/>
               </a:rPr>
-              <a:t>The USC-SIPI suite used across the watermarking literature — peppers, baboon, boats, portraits.</a:t>
+              <a:t>The USC-SIPI suite used across the watermarking literature: peppers, baboon, boats, portraits.</a:t>
             </a:r>
           </a:p>
           <a:p>
@@ -19709,7 +19870,7 @@
                 </a:solidFill>
                 <a:latin typeface="Calibri"/>
               </a:rPr>
-              <a:t> the watermark adds — not luck or coincidence.</a:t>
+              <a:t> the watermark adds, not luck or coincidence.</a:t>
             </a:r>
           </a:p>
         </p:txBody>
